--- a/docs/BioMedMeet_Demo_Deck.pptx
+++ b/docs/BioMedMeet_Demo_Deck.pptx
@@ -4450,7 +4450,7 @@
         <p:spPr>
           <a:xfrm>
             <a:off x="548640" y="1097280"/>
-            <a:ext cx="7315200" cy="365760"/>
+            <a:ext cx="10972800" cy="365760"/>
           </a:xfrm>
           <a:prstGeom prst="rect">
             <a:avLst/>
@@ -10662,7 +10662,7 @@
         <p:spPr>
           <a:xfrm>
             <a:off x="548640" y="1097280"/>
-            <a:ext cx="7315200" cy="365760"/>
+            <a:ext cx="10972800" cy="365760"/>
           </a:xfrm>
           <a:prstGeom prst="rect">
             <a:avLst/>
